--- a/data-eng/decks/w2d5s3.pptx
+++ b/data-eng/decks/w2d5s3.pptx
@@ -3100,7 +3100,7 @@
       <p:grpSpPr/>
       <p:sp>
         <p:nvSpPr>
-          <p:cNvPr id="2" name="Oval 1"/>
+          <p:cNvPr id="2" name="deckgen:decor"/>
           <p:cNvSpPr/>
           <p:nvPr/>
         </p:nvSpPr>
@@ -3130,7 +3130,7 @@
       </p:sp>
       <p:sp>
         <p:nvSpPr>
-          <p:cNvPr id="3" name="Oval 2"/>
+          <p:cNvPr id="3" name="deckgen:decor"/>
           <p:cNvSpPr/>
           <p:nvPr/>
         </p:nvSpPr>
@@ -3160,7 +3160,7 @@
       </p:sp>
       <p:sp>
         <p:nvSpPr>
-          <p:cNvPr id="4" name="Oval 3"/>
+          <p:cNvPr id="4" name="deckgen:decor"/>
           <p:cNvSpPr/>
           <p:nvPr/>
         </p:nvSpPr>
@@ -3190,7 +3190,7 @@
       </p:sp>
       <p:sp>
         <p:nvSpPr>
-          <p:cNvPr id="5" name="Rectangle 4"/>
+          <p:cNvPr id="5" name="deckgen:decor"/>
           <p:cNvSpPr/>
           <p:nvPr/>
         </p:nvSpPr>
@@ -3220,7 +3220,7 @@
       </p:sp>
       <p:sp>
         <p:nvSpPr>
-          <p:cNvPr id="6" name="Oval 5"/>
+          <p:cNvPr id="6" name="deckgen:decor"/>
           <p:cNvSpPr/>
           <p:nvPr/>
         </p:nvSpPr>
@@ -3250,7 +3250,7 @@
       </p:sp>
       <p:sp>
         <p:nvSpPr>
-          <p:cNvPr id="7" name="Oval 6"/>
+          <p:cNvPr id="7" name="deckgen:decor"/>
           <p:cNvSpPr/>
           <p:nvPr/>
         </p:nvSpPr>
@@ -3280,7 +3280,7 @@
       </p:sp>
       <p:sp>
         <p:nvSpPr>
-          <p:cNvPr id="8" name="Oval 7"/>
+          <p:cNvPr id="8" name="deckgen:decor"/>
           <p:cNvSpPr/>
           <p:nvPr/>
         </p:nvSpPr>
@@ -3310,7 +3310,7 @@
       </p:sp>
       <p:sp>
         <p:nvSpPr>
-          <p:cNvPr id="9" name="Oval 8"/>
+          <p:cNvPr id="9" name="deckgen:decor"/>
           <p:cNvSpPr/>
           <p:nvPr/>
         </p:nvSpPr>
@@ -3340,7 +3340,7 @@
       </p:sp>
       <p:sp>
         <p:nvSpPr>
-          <p:cNvPr id="10" name="Rectangle 9"/>
+          <p:cNvPr id="10" name="deckgen:decor"/>
           <p:cNvSpPr/>
           <p:nvPr/>
         </p:nvSpPr>
@@ -3600,7 +3600,7 @@
       <p:grpSpPr/>
       <p:sp>
         <p:nvSpPr>
-          <p:cNvPr id="2" name="Oval 1"/>
+          <p:cNvPr id="2" name="deckgen:decor"/>
           <p:cNvSpPr/>
           <p:nvPr/>
         </p:nvSpPr>
@@ -3630,7 +3630,7 @@
       </p:sp>
       <p:sp>
         <p:nvSpPr>
-          <p:cNvPr id="3" name="Oval 2"/>
+          <p:cNvPr id="3" name="deckgen:decor"/>
           <p:cNvSpPr/>
           <p:nvPr/>
         </p:nvSpPr>
@@ -3660,7 +3660,7 @@
       </p:sp>
       <p:sp>
         <p:nvSpPr>
-          <p:cNvPr id="4" name="Oval 3"/>
+          <p:cNvPr id="4" name="deckgen:decor"/>
           <p:cNvSpPr/>
           <p:nvPr/>
         </p:nvSpPr>
@@ -3941,7 +3941,7 @@
                 <a:ea typeface="Pretendard"/>
                 <a:cs typeface="Pretendard"/>
               </a:rPr>
-              <a:t>DESC quotes 에 UNIQUE 키가 보인다</a:t>
+              <a:t>DESC quotes 에서 author 의 Key 가 MUL (복합 UNIQUE 의 첫 칸)</a:t>
             </a:r>
           </a:p>
         </p:txBody>
@@ -4087,7 +4087,7 @@
                 <a:ea typeface="Pretendard"/>
                 <a:cs typeface="Pretendard"/>
               </a:rPr>
-              <a:t>첫 실행: page 1~3 parsed 10 / saved 10, 3초 남짓</a:t>
+              <a:t>첫 실행: page 1~3 parsed 10 / saved 10, 8초 안팎</a:t>
             </a:r>
           </a:p>
         </p:txBody>
@@ -4808,7 +4808,7 @@
       <p:grpSpPr/>
       <p:sp>
         <p:nvSpPr>
-          <p:cNvPr id="2" name="Oval 1"/>
+          <p:cNvPr id="2" name="deckgen:decor"/>
           <p:cNvSpPr/>
           <p:nvPr/>
         </p:nvSpPr>
@@ -4838,7 +4838,7 @@
       </p:sp>
       <p:sp>
         <p:nvSpPr>
-          <p:cNvPr id="3" name="Oval 2"/>
+          <p:cNvPr id="3" name="deckgen:decor"/>
           <p:cNvSpPr/>
           <p:nvPr/>
         </p:nvSpPr>
@@ -5615,7 +5615,7 @@
       <p:grpSpPr/>
       <p:sp>
         <p:nvSpPr>
-          <p:cNvPr id="2" name="Oval 1"/>
+          <p:cNvPr id="2" name="deckgen:decor"/>
           <p:cNvSpPr/>
           <p:nvPr/>
         </p:nvSpPr>
@@ -5645,7 +5645,7 @@
       </p:sp>
       <p:sp>
         <p:nvSpPr>
-          <p:cNvPr id="3" name="Oval 2"/>
+          <p:cNvPr id="3" name="deckgen:decor"/>
           <p:cNvSpPr/>
           <p:nvPr/>
         </p:nvSpPr>
@@ -5675,7 +5675,7 @@
       </p:sp>
       <p:sp>
         <p:nvSpPr>
-          <p:cNvPr id="4" name="Oval 3"/>
+          <p:cNvPr id="4" name="deckgen:decor"/>
           <p:cNvSpPr/>
           <p:nvPr/>
         </p:nvSpPr>
@@ -6606,7 +6606,7 @@
       <p:grpSpPr/>
       <p:sp>
         <p:nvSpPr>
-          <p:cNvPr id="2" name="Oval 1"/>
+          <p:cNvPr id="2" name="deckgen:decor"/>
           <p:cNvSpPr/>
           <p:nvPr/>
         </p:nvSpPr>
@@ -6636,7 +6636,7 @@
       </p:sp>
       <p:sp>
         <p:nvSpPr>
-          <p:cNvPr id="3" name="Oval 2"/>
+          <p:cNvPr id="3" name="deckgen:decor"/>
           <p:cNvSpPr/>
           <p:nvPr/>
         </p:nvSpPr>
@@ -6666,7 +6666,7 @@
       </p:sp>
       <p:sp>
         <p:nvSpPr>
-          <p:cNvPr id="4" name="Oval 3"/>
+          <p:cNvPr id="4" name="deckgen:decor"/>
           <p:cNvSpPr/>
           <p:nvPr/>
         </p:nvSpPr>
@@ -6842,7 +6842,7 @@
                 <a:ea typeface="Pretendard"/>
                 <a:cs typeface="Pretendard"/>
               </a:rPr>
-              <a:t>quotes.toscrape.com 3페이지를 shop 데이터베이스의 quotes 표로 옮깁니다</a:t>
+              <a:t>mysql&gt; 접속은 실습점검 3단계 명령 그대로 — SQL 은 거기서, 파이썬은 (.venv) 터미널에서</a:t>
             </a:r>
           </a:p>
         </p:txBody>
@@ -7799,7 +7799,7 @@
       <p:grpSpPr/>
       <p:sp>
         <p:nvSpPr>
-          <p:cNvPr id="2" name="Oval 1"/>
+          <p:cNvPr id="2" name="deckgen:decor"/>
           <p:cNvSpPr/>
           <p:nvPr/>
         </p:nvSpPr>
@@ -7829,7 +7829,7 @@
       </p:sp>
       <p:sp>
         <p:nvSpPr>
-          <p:cNvPr id="3" name="Oval 2"/>
+          <p:cNvPr id="3" name="deckgen:decor"/>
           <p:cNvSpPr/>
           <p:nvPr/>
         </p:nvSpPr>
@@ -7859,7 +7859,7 @@
       </p:sp>
       <p:sp>
         <p:nvSpPr>
-          <p:cNvPr id="4" name="Oval 3"/>
+          <p:cNvPr id="4" name="deckgen:decor"/>
           <p:cNvSpPr/>
           <p:nvPr/>
         </p:nvSpPr>
@@ -8511,7 +8511,7 @@
                 <a:ea typeface="Pretendard"/>
                 <a:cs typeface="Pretendard"/>
               </a:rPr>
-              <a:t>quote_text VARCHAR(500)</a:t>
+              <a:t>quote_text TEXT</a:t>
             </a:r>
           </a:p>
         </p:txBody>
@@ -8586,7 +8586,7 @@
                 <a:ea typeface="Pretendard"/>
                 <a:cs typeface="Pretendard"/>
               </a:rPr>
-              <a:t>본문</a:t>
+              <a:t>본문 — VARCHAR(500) 이면 긴 명언이 잘린다</a:t>
             </a:r>
           </a:p>
         </p:txBody>
@@ -9118,7 +9118,7 @@
                 <a:ea typeface="Pretendard"/>
                 <a:cs typeface="Pretendard"/>
               </a:rPr>
-              <a:t>quote_text(200) = 앞 200자만 인덱스에 쓴다 — 긴 문자열에 인덱스를 걸 때의 문법</a:t>
+              <a:t>확인 포인트: DESC quotes 에서 author 의 Key 가 MUL — 복합 UNIQUE 의 첫 칸. quote_text(200) 은 앞 200자만 인덱스에</a:t>
             </a:r>
           </a:p>
         </p:txBody>
@@ -9255,7 +9255,7 @@
       <p:grpSpPr/>
       <p:sp>
         <p:nvSpPr>
-          <p:cNvPr id="2" name="Oval 1"/>
+          <p:cNvPr id="2" name="deckgen:decor"/>
           <p:cNvSpPr/>
           <p:nvPr/>
         </p:nvSpPr>
@@ -9285,7 +9285,7 @@
       </p:sp>
       <p:sp>
         <p:nvSpPr>
-          <p:cNvPr id="3" name="Oval 2"/>
+          <p:cNvPr id="3" name="deckgen:decor"/>
           <p:cNvSpPr/>
           <p:nvPr/>
         </p:nvSpPr>
@@ -9315,7 +9315,7 @@
       </p:sp>
       <p:sp>
         <p:nvSpPr>
-          <p:cNvPr id="4" name="Oval 3"/>
+          <p:cNvPr id="4" name="deckgen:decor"/>
           <p:cNvSpPr/>
           <p:nvPr/>
         </p:nvSpPr>
@@ -10312,7 +10312,7 @@
                 <a:ea typeface="Pretendard"/>
                 <a:cs typeface="Pretendard"/>
               </a:rPr>
-              <a:t>확인 포인트: page 1~3 각각 parsed 10, saved 10 — 요청 간격 때문에 3초 남짓 걸리는 것이 정상</a:t>
+              <a:t>확인 포인트: page 1~3 각각 parsed 10, saved 10 — 요청 셋 + 간격 1초 둘로 8초 안팎(실측 7.6초)</a:t>
             </a:r>
           </a:p>
         </p:txBody>
@@ -10449,7 +10449,7 @@
       <p:grpSpPr/>
       <p:sp>
         <p:nvSpPr>
-          <p:cNvPr id="2" name="Oval 1"/>
+          <p:cNvPr id="2" name="deckgen:decor"/>
           <p:cNvSpPr/>
           <p:nvPr/>
         </p:nvSpPr>
@@ -10479,7 +10479,7 @@
       </p:sp>
       <p:sp>
         <p:nvSpPr>
-          <p:cNvPr id="3" name="Oval 2"/>
+          <p:cNvPr id="3" name="deckgen:decor"/>
           <p:cNvSpPr/>
           <p:nvPr/>
         </p:nvSpPr>
@@ -10509,7 +10509,7 @@
       </p:sp>
       <p:sp>
         <p:nvSpPr>
-          <p:cNvPr id="4" name="Oval 3"/>
+          <p:cNvPr id="4" name="deckgen:decor"/>
           <p:cNvSpPr/>
           <p:nvPr/>
         </p:nvSpPr>
@@ -11476,7 +11476,7 @@
       <p:grpSpPr/>
       <p:sp>
         <p:nvSpPr>
-          <p:cNvPr id="2" name="Oval 1"/>
+          <p:cNvPr id="2" name="deckgen:decor"/>
           <p:cNvSpPr/>
           <p:nvPr/>
         </p:nvSpPr>
@@ -11506,7 +11506,7 @@
       </p:sp>
       <p:sp>
         <p:nvSpPr>
-          <p:cNvPr id="3" name="Oval 2"/>
+          <p:cNvPr id="3" name="deckgen:decor"/>
           <p:cNvSpPr/>
           <p:nvPr/>
         </p:nvSpPr>
@@ -11536,7 +11536,7 @@
       </p:sp>
       <p:sp>
         <p:nvSpPr>
-          <p:cNvPr id="4" name="Oval 3"/>
+          <p:cNvPr id="4" name="deckgen:decor"/>
           <p:cNvSpPr/>
           <p:nvPr/>
         </p:nvSpPr>
@@ -12000,7 +12000,7 @@
                 <a:ea typeface="Pretendard"/>
                 <a:cs typeface="Pretendard"/>
               </a:rPr>
-              <a:t>3초 남짓 — 요청 간격 1초</a:t>
+              <a:t>8초 안팎 — 요청 간격 1초</a:t>
             </a:r>
           </a:p>
         </p:txBody>
@@ -12537,7 +12537,7 @@
       <p:grpSpPr/>
       <p:sp>
         <p:nvSpPr>
-          <p:cNvPr id="2" name="Oval 1"/>
+          <p:cNvPr id="2" name="deckgen:decor"/>
           <p:cNvSpPr/>
           <p:nvPr/>
         </p:nvSpPr>
@@ -12567,7 +12567,7 @@
       </p:sp>
       <p:sp>
         <p:nvSpPr>
-          <p:cNvPr id="3" name="Oval 2"/>
+          <p:cNvPr id="3" name="deckgen:decor"/>
           <p:cNvSpPr/>
           <p:nvPr/>
         </p:nvSpPr>
@@ -12597,7 +12597,7 @@
       </p:sp>
       <p:sp>
         <p:nvSpPr>
-          <p:cNvPr id="4" name="Oval 3"/>
+          <p:cNvPr id="4" name="deckgen:decor"/>
           <p:cNvSpPr/>
           <p:nvPr/>
         </p:nvSpPr>
@@ -13561,7 +13561,7 @@
       <p:grpSpPr/>
       <p:sp>
         <p:nvSpPr>
-          <p:cNvPr id="2" name="Oval 1"/>
+          <p:cNvPr id="2" name="deckgen:decor"/>
           <p:cNvSpPr/>
           <p:nvPr/>
         </p:nvSpPr>
@@ -13591,7 +13591,7 @@
       </p:sp>
       <p:sp>
         <p:nvSpPr>
-          <p:cNvPr id="3" name="Oval 2"/>
+          <p:cNvPr id="3" name="deckgen:decor"/>
           <p:cNvSpPr/>
           <p:nvPr/>
         </p:nvSpPr>
@@ -13621,7 +13621,7 @@
       </p:sp>
       <p:sp>
         <p:nvSpPr>
-          <p:cNvPr id="4" name="Oval 3"/>
+          <p:cNvPr id="4" name="deckgen:decor"/>
           <p:cNvSpPr/>
           <p:nvPr/>
         </p:nvSpPr>
@@ -13797,7 +13797,7 @@
                 <a:ea typeface="Pretendard"/>
                 <a:cs typeface="Pretendard"/>
               </a:rPr>
-              <a:t>실제 크롤러는 실패합니다 — 네트워크가 끊기고, 5xx 가 오고, 페이지 구조가 바뀝니다</a:t>
+              <a:t>새 파일이 아니다 — crawler_pipeline.py 의 def fetch 네 줄을 바꿔 넣는다. 없는 주소 시험은 15초 안팎</a:t>
             </a:r>
           </a:p>
         </p:txBody>
